--- a/plugins/presentation/skills/pptx-arch-style/scripts/tests/fixtures/edge/title-zone-smoke-test.pptx
+++ b/plugins/presentation/skills/pptx-arch-style/scripts/tests/fixtures/edge/title-zone-smoke-test.pptx
@@ -1037,7 +1037,7 @@
         </p:nvSpPr>
         <p:spPr>
           <a:xfrm>
-            <a:off x="0" y="777240"/>
+            <a:off x="0" y="457200"/>
             <a:ext cx="9144000" cy="38405"/>
           </a:xfrm>
           <a:prstGeom prst="rect">
@@ -1058,7 +1058,7 @@
         <p:spPr>
           <a:xfrm>
             <a:off x="685800" y="0"/>
-            <a:ext cx="8443570" cy="777240"/>
+            <a:ext cx="8443570" cy="572414"/>
           </a:xfrm>
           <a:prstGeom prst="rect">
             <a:avLst/>
@@ -1067,7 +1067,7 @@
           <a:ln/>
         </p:spPr>
         <p:txBody>
-          <a:bodyPr wrap="square" rtlCol="0" anchor="t"/>
+          <a:bodyPr wrap="square" rtlCol="0" anchor="ctr"/>
           <a:lstStyle/>
           <a:p>
             <a:pPr algn="l" indent="0" marL="0">
@@ -1096,7 +1096,7 @@
         </p:nvSpPr>
         <p:spPr>
           <a:xfrm>
-            <a:off x="548640" y="1005840"/>
+            <a:off x="548640" y="719633"/>
             <a:ext cx="8046720" cy="457200"/>
           </a:xfrm>
           <a:prstGeom prst="rect">
@@ -1124,45 +1124,6 @@
               <a:t>Body text in approved font and size.</a:t>
             </a:r>
             <a:endParaRPr lang="en-US" sz="1050" dirty="0"/>
-          </a:p>
-        </p:txBody>
-      </p:sp>
-      <p:sp>
-        <p:nvSpPr>
-          <p:cNvPr id="8" name="Text 5"/>
-          <p:cNvSpPr/>
-          <p:nvPr/>
-        </p:nvSpPr>
-        <p:spPr>
-          <a:xfrm>
-            <a:off x="685800" y="822960"/>
-            <a:ext cx="8229600" cy="164592"/>
-          </a:xfrm>
-          <a:prstGeom prst="rect">
-            <a:avLst/>
-          </a:prstGeom>
-          <a:noFill/>
-          <a:ln/>
-        </p:spPr>
-        <p:txBody>
-          <a:bodyPr wrap="square" rtlCol="0" anchor="ctr"/>
-          <a:lstStyle/>
-          <a:p>
-            <a:pPr algn="l" indent="0" marL="0">
-              <a:buNone/>
-            </a:pPr>
-            <a:r>
-              <a:rPr lang="en-US" sz="1000" dirty="0">
-                <a:solidFill>
-                  <a:srgbClr val="666666"/>
-                </a:solidFill>
-                <a:latin typeface="Roboto Condensed" pitchFamily="34" charset="0"/>
-                <a:ea typeface="Roboto Condensed" pitchFamily="34" charset="-122"/>
-                <a:cs typeface="Roboto Condensed" pitchFamily="34" charset="-120"/>
-              </a:rPr>
-              <a:t>Subtitle line — sits under the red line</a:t>
-            </a:r>
-            <a:endParaRPr lang="en-US" sz="1000" dirty="0"/>
           </a:p>
         </p:txBody>
       </p:sp>
@@ -1271,7 +1232,7 @@
         </p:nvSpPr>
         <p:spPr>
           <a:xfrm>
-            <a:off x="0" y="777240"/>
+            <a:off x="0" y="457200"/>
             <a:ext cx="9144000" cy="38405"/>
           </a:xfrm>
           <a:prstGeom prst="rect">
@@ -1292,7 +1253,7 @@
         <p:spPr>
           <a:xfrm>
             <a:off x="685800" y="0"/>
-            <a:ext cx="8443570" cy="777240"/>
+            <a:ext cx="8443570" cy="572414"/>
           </a:xfrm>
           <a:prstGeom prst="rect">
             <a:avLst/>
@@ -1301,7 +1262,7 @@
           <a:ln/>
         </p:spPr>
         <p:txBody>
-          <a:bodyPr wrap="square" rtlCol="0" anchor="t"/>
+          <a:bodyPr wrap="square" rtlCol="0" anchor="ctr"/>
           <a:lstStyle/>
           <a:p>
             <a:pPr algn="l" indent="0" marL="0">
@@ -1316,7 +1277,7 @@
                 <a:ea typeface="Arial" pitchFamily="34" charset="-122"/>
                 <a:cs typeface="Arial" pitchFamily="34" charset="-120"/>
               </a:rPr>
-              <a:t>Рекомендация: Путь 1 — Camunda 8 как отдельная информационная система</a:t>
+              <a:t>Рекомендация: Путь 1</a:t>
             </a:r>
             <a:endParaRPr lang="en-US" sz="2400" dirty="0"/>
           </a:p>
@@ -1330,7 +1291,7 @@
         </p:nvSpPr>
         <p:spPr>
           <a:xfrm>
-            <a:off x="548640" y="1005840"/>
+            <a:off x="548640" y="719633"/>
             <a:ext cx="8046720" cy="457200"/>
           </a:xfrm>
           <a:prstGeom prst="rect">
@@ -1369,8 +1330,8 @@
         </p:nvSpPr>
         <p:spPr>
           <a:xfrm>
-            <a:off x="685800" y="822960"/>
-            <a:ext cx="8229600" cy="164592"/>
+            <a:off x="685800" y="502920"/>
+            <a:ext cx="8229600" cy="201168"/>
           </a:xfrm>
           <a:prstGeom prst="rect">
             <a:avLst/>
@@ -1394,7 +1355,7 @@
                 <a:ea typeface="Roboto Condensed" pitchFamily="34" charset="-122"/>
                 <a:cs typeface="Roboto Condensed" pitchFamily="34" charset="-120"/>
               </a:rPr>
-              <a:t>Subtitle line — under wrapped 2-line title</a:t>
+              <a:t>Camunda 8 как отдельная информационная система</a:t>
             </a:r>
             <a:endParaRPr lang="en-US" sz="1000" dirty="0"/>
           </a:p>
